--- a/fixtures/rules/off-palette-color--pos.pptx
+++ b/fixtures/rules/off-palette-color--pos.pptx
@@ -705,7 +705,7 @@
           <a:noFill/>
         </p:spPr>
         <p:txBody>
-          <a:bodyPr vert="horz" wrap="square" lIns="0" tIns="0" rIns="0" bIns="0" rtlCol="0" anchor="t">
+          <a:bodyPr vert="horz" wrap="square" lIns="0" tIns="0" rIns="0" bIns="18582" rtlCol="0" anchor="b">
             <a:noAutofit/>
           </a:bodyPr>
           <a:lstStyle>
@@ -1204,7 +1204,7 @@
           <a:noFill/>
         </p:spPr>
         <p:txBody>
-          <a:bodyPr vert="horz" wrap="square" lIns="0" tIns="0" rIns="0" bIns="0" rtlCol="0" anchor="t">
+          <a:bodyPr vert="horz" wrap="square" lIns="0" tIns="0" rIns="0" bIns="13514" rtlCol="0" anchor="b">
             <a:noAutofit/>
           </a:bodyPr>
           <a:lstStyle>
@@ -1385,7 +1385,7 @@
           <a:noFill/>
         </p:spPr>
         <p:txBody>
-          <a:bodyPr vert="horz" wrap="square" lIns="0" tIns="0" rIns="0" bIns="0" rtlCol="0" anchor="t">
+          <a:bodyPr vert="horz" wrap="square" lIns="0" tIns="0" rIns="0" bIns="13514" rtlCol="0" anchor="b">
             <a:noAutofit/>
           </a:bodyPr>
           <a:lstStyle>
@@ -1747,7 +1747,7 @@
           <a:noFill/>
         </p:spPr>
         <p:txBody>
-          <a:bodyPr vert="horz" wrap="square" lIns="0" tIns="0" rIns="0" bIns="0" rtlCol="0" anchor="t">
+          <a:bodyPr vert="horz" wrap="square" lIns="0" tIns="0" rIns="0" bIns="18582" rtlCol="0" anchor="b">
             <a:noAutofit/>
           </a:bodyPr>
           <a:lstStyle>

--- a/fixtures/rules/off-palette-color--pos.pptx
+++ b/fixtures/rules/off-palette-color--pos.pptx
@@ -705,7 +705,7 @@
           <a:noFill/>
         </p:spPr>
         <p:txBody>
-          <a:bodyPr vert="horz" wrap="square" lIns="0" tIns="0" rIns="0" bIns="18582" rtlCol="0" anchor="b">
+          <a:bodyPr vert="horz" wrap="square" lIns="0" tIns="0" rIns="0" bIns="41910" rtlCol="0" anchor="b">
             <a:noAutofit/>
           </a:bodyPr>
           <a:lstStyle>
@@ -1204,7 +1204,7 @@
           <a:noFill/>
         </p:spPr>
         <p:txBody>
-          <a:bodyPr vert="horz" wrap="square" lIns="0" tIns="0" rIns="0" bIns="13514" rtlCol="0" anchor="b">
+          <a:bodyPr vert="horz" wrap="square" lIns="0" tIns="0" rIns="0" bIns="30480" rtlCol="0" anchor="b">
             <a:noAutofit/>
           </a:bodyPr>
           <a:lstStyle>
@@ -1385,7 +1385,7 @@
           <a:noFill/>
         </p:spPr>
         <p:txBody>
-          <a:bodyPr vert="horz" wrap="square" lIns="0" tIns="0" rIns="0" bIns="13514" rtlCol="0" anchor="b">
+          <a:bodyPr vert="horz" wrap="square" lIns="0" tIns="0" rIns="0" bIns="30480" rtlCol="0" anchor="b">
             <a:noAutofit/>
           </a:bodyPr>
           <a:lstStyle>
@@ -1747,7 +1747,7 @@
           <a:noFill/>
         </p:spPr>
         <p:txBody>
-          <a:bodyPr vert="horz" wrap="square" lIns="0" tIns="0" rIns="0" bIns="18582" rtlCol="0" anchor="b">
+          <a:bodyPr vert="horz" wrap="square" lIns="0" tIns="0" rIns="0" bIns="41910" rtlCol="0" anchor="b">
             <a:noAutofit/>
           </a:bodyPr>
           <a:lstStyle>

--- a/fixtures/rules/off-palette-color--pos.pptx
+++ b/fixtures/rules/off-palette-color--pos.pptx
@@ -27,6 +27,7 @@
           <a:srgbClr val="111111"/>
         </a:solidFill>
         <a:latin typeface="+mn-lt"/>
+        <a:cs typeface="+mn-cs"/>
       </a:defRPr>
     </a:lvl1pPr>
     <a:lvl2pPr marL="0" indent="0" algn="l">
@@ -45,6 +46,7 @@
           <a:srgbClr val="111111"/>
         </a:solidFill>
         <a:latin typeface="+mn-lt"/>
+        <a:cs typeface="+mn-cs"/>
       </a:defRPr>
     </a:lvl2pPr>
     <a:lvl3pPr marL="0" indent="0" algn="l">
@@ -63,6 +65,7 @@
           <a:srgbClr val="111111"/>
         </a:solidFill>
         <a:latin typeface="+mn-lt"/>
+        <a:cs typeface="+mn-cs"/>
       </a:defRPr>
     </a:lvl3pPr>
     <a:lvl4pPr marL="0" indent="0" algn="l">
@@ -81,6 +84,7 @@
           <a:srgbClr val="111111"/>
         </a:solidFill>
         <a:latin typeface="+mn-lt"/>
+        <a:cs typeface="+mn-cs"/>
       </a:defRPr>
     </a:lvl4pPr>
     <a:lvl5pPr marL="0" indent="0" algn="l">
@@ -99,6 +103,7 @@
           <a:srgbClr val="111111"/>
         </a:solidFill>
         <a:latin typeface="+mn-lt"/>
+        <a:cs typeface="+mn-cs"/>
       </a:defRPr>
     </a:lvl5pPr>
     <a:lvl6pPr marL="0" indent="0" algn="l">
@@ -117,6 +122,7 @@
           <a:srgbClr val="111111"/>
         </a:solidFill>
         <a:latin typeface="+mn-lt"/>
+        <a:cs typeface="+mn-cs"/>
       </a:defRPr>
     </a:lvl6pPr>
     <a:lvl7pPr marL="0" indent="0" algn="l">
@@ -135,6 +141,7 @@
           <a:srgbClr val="111111"/>
         </a:solidFill>
         <a:latin typeface="+mn-lt"/>
+        <a:cs typeface="+mn-cs"/>
       </a:defRPr>
     </a:lvl7pPr>
     <a:lvl8pPr marL="0" indent="0" algn="l">
@@ -153,6 +160,7 @@
           <a:srgbClr val="111111"/>
         </a:solidFill>
         <a:latin typeface="+mn-lt"/>
+        <a:cs typeface="+mn-cs"/>
       </a:defRPr>
     </a:lvl8pPr>
     <a:lvl9pPr marL="0" indent="0" algn="l">
@@ -171,6 +179,7 @@
           <a:srgbClr val="111111"/>
         </a:solidFill>
         <a:latin typeface="+mn-lt"/>
+        <a:cs typeface="+mn-cs"/>
       </a:defRPr>
     </a:lvl9pPr>
   </p:defaultTextStyle>
@@ -725,6 +734,7 @@
                   <a:srgbClr val="111111"/>
                 </a:solidFill>
                 <a:latin typeface="+mj-lt"/>
+                <a:cs typeface="+mj-cs"/>
               </a:defRPr>
             </a:lvl1pPr>
           </a:lstStyle>
@@ -777,6 +787,7 @@
                   <a:srgbClr val="111111"/>
                 </a:solidFill>
                 <a:latin typeface="+mn-lt"/>
+                <a:cs typeface="+mn-cs"/>
               </a:defRPr>
             </a:lvl1pPr>
           </a:lstStyle>
@@ -829,6 +840,7 @@
                   <a:srgbClr val="5C5C5A"/>
                 </a:solidFill>
                 <a:latin typeface="+mn-lt"/>
+                <a:cs typeface="+mn-cs"/>
               </a:defRPr>
             </a:lvl1pPr>
           </a:lstStyle>
@@ -914,6 +926,7 @@
                   <a:srgbClr val="F2F2F0"/>
                 </a:solidFill>
                 <a:latin typeface="+mj-lt"/>
+                <a:cs typeface="+mj-cs"/>
               </a:defRPr>
             </a:lvl1pPr>
           </a:lstStyle>
@@ -966,6 +979,7 @@
                   <a:srgbClr val="E8422E"/>
                 </a:solidFill>
                 <a:latin typeface="+mn-lt"/>
+                <a:cs typeface="+mn-cs"/>
               </a:defRPr>
             </a:lvl1pPr>
           </a:lstStyle>
@@ -1043,6 +1057,7 @@
                   <a:srgbClr val="111111"/>
                 </a:solidFill>
                 <a:latin typeface="+mj-lt"/>
+                <a:cs typeface="+mj-cs"/>
               </a:defRPr>
             </a:lvl1pPr>
           </a:lstStyle>
@@ -1095,6 +1110,7 @@
                   <a:srgbClr val="111111"/>
                 </a:solidFill>
                 <a:latin typeface="+mn-lt"/>
+                <a:cs typeface="+mn-cs"/>
               </a:defRPr>
             </a:lvl1pPr>
           </a:lstStyle>
@@ -1147,6 +1163,7 @@
                   <a:srgbClr val="5C5C5A"/>
                 </a:solidFill>
                 <a:latin typeface="+mn-lt"/>
+                <a:cs typeface="+mn-cs"/>
               </a:defRPr>
             </a:lvl1pPr>
           </a:lstStyle>
@@ -1224,6 +1241,7 @@
                   <a:srgbClr val="111111"/>
                 </a:solidFill>
                 <a:latin typeface="+mj-lt"/>
+                <a:cs typeface="+mj-cs"/>
               </a:defRPr>
             </a:lvl1pPr>
           </a:lstStyle>
@@ -1276,6 +1294,7 @@
                   <a:srgbClr val="111111"/>
                 </a:solidFill>
                 <a:latin typeface="+mn-lt"/>
+                <a:cs typeface="+mn-cs"/>
               </a:defRPr>
             </a:lvl1pPr>
           </a:lstStyle>
@@ -1328,6 +1347,7 @@
                   <a:srgbClr val="5C5C5A"/>
                 </a:solidFill>
                 <a:latin typeface="+mn-lt"/>
+                <a:cs typeface="+mn-cs"/>
               </a:defRPr>
             </a:lvl1pPr>
           </a:lstStyle>
@@ -1405,6 +1425,7 @@
                   <a:srgbClr val="111111"/>
                 </a:solidFill>
                 <a:latin typeface="+mj-lt"/>
+                <a:cs typeface="+mj-cs"/>
               </a:defRPr>
             </a:lvl1pPr>
           </a:lstStyle>
@@ -1457,6 +1478,7 @@
                   <a:srgbClr val="111111"/>
                 </a:solidFill>
                 <a:latin typeface="+mn-lt"/>
+                <a:cs typeface="+mn-cs"/>
               </a:defRPr>
             </a:lvl1pPr>
           </a:lstStyle>
@@ -1509,6 +1531,7 @@
                   <a:srgbClr val="111111"/>
                 </a:solidFill>
                 <a:latin typeface="+mn-lt"/>
+                <a:cs typeface="+mn-cs"/>
               </a:defRPr>
             </a:lvl1pPr>
           </a:lstStyle>
@@ -1561,6 +1584,7 @@
                   <a:srgbClr val="5C5C5A"/>
                 </a:solidFill>
                 <a:latin typeface="+mn-lt"/>
+                <a:cs typeface="+mn-cs"/>
               </a:defRPr>
             </a:lvl1pPr>
           </a:lstStyle>
@@ -1638,6 +1662,7 @@
                   <a:srgbClr val="111111"/>
                 </a:solidFill>
                 <a:latin typeface="+mj-lt"/>
+                <a:cs typeface="+mj-cs"/>
               </a:defRPr>
             </a:lvl1pPr>
           </a:lstStyle>
@@ -1690,6 +1715,7 @@
                   <a:srgbClr val="5C5C5A"/>
                 </a:solidFill>
                 <a:latin typeface="+mn-lt"/>
+                <a:cs typeface="+mn-cs"/>
               </a:defRPr>
             </a:lvl1pPr>
           </a:lstStyle>
@@ -1767,6 +1793,7 @@
                   <a:srgbClr val="111111"/>
                 </a:solidFill>
                 <a:latin typeface="+mj-lt"/>
+                <a:cs typeface="+mj-cs"/>
               </a:defRPr>
             </a:lvl1pPr>
           </a:lstStyle>
@@ -1819,6 +1846,7 @@
                   <a:srgbClr val="111111"/>
                 </a:solidFill>
                 <a:latin typeface="+mn-lt"/>
+                <a:cs typeface="+mn-cs"/>
               </a:defRPr>
             </a:lvl1pPr>
           </a:lstStyle>
@@ -1871,6 +1899,7 @@
                   <a:srgbClr val="5C5C5A"/>
                 </a:solidFill>
                 <a:latin typeface="+mn-lt"/>
+                <a:cs typeface="+mn-cs"/>
               </a:defRPr>
             </a:lvl1pPr>
           </a:lstStyle>
@@ -1956,6 +1985,7 @@
                   <a:srgbClr val="111111"/>
                 </a:solidFill>
                 <a:latin typeface="+mj-lt"/>
+                <a:cs typeface="+mj-cs"/>
               </a:defRPr>
             </a:lvl1pPr>
           </a:lstStyle>
@@ -2008,6 +2038,7 @@
                   <a:srgbClr val="111111"/>
                 </a:solidFill>
                 <a:latin typeface="+mn-lt"/>
+                <a:cs typeface="+mn-cs"/>
               </a:defRPr>
             </a:lvl1pPr>
           </a:lstStyle>
@@ -2049,6 +2080,7 @@
             <a:srgbClr val="111111"/>
           </a:solidFill>
           <a:latin typeface="+mj-lt"/>
+          <a:cs typeface="+mj-cs"/>
         </a:defRPr>
       </a:lvl1pPr>
       <a:lvl2pPr marL="0" indent="0" algn="l">
@@ -2067,6 +2099,7 @@
             <a:srgbClr val="111111"/>
           </a:solidFill>
           <a:latin typeface="+mj-lt"/>
+          <a:cs typeface="+mj-cs"/>
         </a:defRPr>
       </a:lvl2pPr>
       <a:lvl3pPr marL="0" indent="0" algn="l">
@@ -2085,6 +2118,7 @@
             <a:srgbClr val="111111"/>
           </a:solidFill>
           <a:latin typeface="+mj-lt"/>
+          <a:cs typeface="+mj-cs"/>
         </a:defRPr>
       </a:lvl3pPr>
       <a:lvl4pPr marL="0" indent="0" algn="l">
@@ -2103,6 +2137,7 @@
             <a:srgbClr val="111111"/>
           </a:solidFill>
           <a:latin typeface="+mj-lt"/>
+          <a:cs typeface="+mj-cs"/>
         </a:defRPr>
       </a:lvl4pPr>
       <a:lvl5pPr marL="0" indent="0" algn="l">
@@ -2121,6 +2156,7 @@
             <a:srgbClr val="111111"/>
           </a:solidFill>
           <a:latin typeface="+mj-lt"/>
+          <a:cs typeface="+mj-cs"/>
         </a:defRPr>
       </a:lvl5pPr>
       <a:lvl6pPr marL="0" indent="0" algn="l">
@@ -2139,6 +2175,7 @@
             <a:srgbClr val="111111"/>
           </a:solidFill>
           <a:latin typeface="+mj-lt"/>
+          <a:cs typeface="+mj-cs"/>
         </a:defRPr>
       </a:lvl6pPr>
       <a:lvl7pPr marL="0" indent="0" algn="l">
@@ -2157,6 +2194,7 @@
             <a:srgbClr val="111111"/>
           </a:solidFill>
           <a:latin typeface="+mj-lt"/>
+          <a:cs typeface="+mj-cs"/>
         </a:defRPr>
       </a:lvl7pPr>
       <a:lvl8pPr marL="0" indent="0" algn="l">
@@ -2175,6 +2213,7 @@
             <a:srgbClr val="111111"/>
           </a:solidFill>
           <a:latin typeface="+mj-lt"/>
+          <a:cs typeface="+mj-cs"/>
         </a:defRPr>
       </a:lvl8pPr>
       <a:lvl9pPr marL="0" indent="0" algn="l">
@@ -2193,6 +2232,7 @@
             <a:srgbClr val="111111"/>
           </a:solidFill>
           <a:latin typeface="+mj-lt"/>
+          <a:cs typeface="+mj-cs"/>
         </a:defRPr>
       </a:lvl9pPr>
     </p:titleStyle>
@@ -2213,6 +2253,7 @@
             <a:srgbClr val="111111"/>
           </a:solidFill>
           <a:latin typeface="+mn-lt"/>
+          <a:cs typeface="+mn-cs"/>
         </a:defRPr>
       </a:lvl1pPr>
       <a:lvl2pPr marL="0" indent="0" algn="l">
@@ -2231,6 +2272,7 @@
             <a:srgbClr val="111111"/>
           </a:solidFill>
           <a:latin typeface="+mn-lt"/>
+          <a:cs typeface="+mn-cs"/>
         </a:defRPr>
       </a:lvl2pPr>
       <a:lvl3pPr marL="0" indent="0" algn="l">
@@ -2249,6 +2291,7 @@
             <a:srgbClr val="111111"/>
           </a:solidFill>
           <a:latin typeface="+mn-lt"/>
+          <a:cs typeface="+mn-cs"/>
         </a:defRPr>
       </a:lvl3pPr>
       <a:lvl4pPr marL="0" indent="0" algn="l">
@@ -2267,6 +2310,7 @@
             <a:srgbClr val="111111"/>
           </a:solidFill>
           <a:latin typeface="+mn-lt"/>
+          <a:cs typeface="+mn-cs"/>
         </a:defRPr>
       </a:lvl4pPr>
       <a:lvl5pPr marL="0" indent="0" algn="l">
@@ -2285,6 +2329,7 @@
             <a:srgbClr val="111111"/>
           </a:solidFill>
           <a:latin typeface="+mn-lt"/>
+          <a:cs typeface="+mn-cs"/>
         </a:defRPr>
       </a:lvl5pPr>
       <a:lvl6pPr marL="0" indent="0" algn="l">
@@ -2303,6 +2348,7 @@
             <a:srgbClr val="111111"/>
           </a:solidFill>
           <a:latin typeface="+mn-lt"/>
+          <a:cs typeface="+mn-cs"/>
         </a:defRPr>
       </a:lvl6pPr>
       <a:lvl7pPr marL="0" indent="0" algn="l">
@@ -2321,6 +2367,7 @@
             <a:srgbClr val="111111"/>
           </a:solidFill>
           <a:latin typeface="+mn-lt"/>
+          <a:cs typeface="+mn-cs"/>
         </a:defRPr>
       </a:lvl7pPr>
       <a:lvl8pPr marL="0" indent="0" algn="l">
@@ -2339,6 +2386,7 @@
             <a:srgbClr val="111111"/>
           </a:solidFill>
           <a:latin typeface="+mn-lt"/>
+          <a:cs typeface="+mn-cs"/>
         </a:defRPr>
       </a:lvl8pPr>
       <a:lvl9pPr marL="0" indent="0" algn="l">
@@ -2357,6 +2405,7 @@
             <a:srgbClr val="111111"/>
           </a:solidFill>
           <a:latin typeface="+mn-lt"/>
+          <a:cs typeface="+mn-cs"/>
         </a:defRPr>
       </a:lvl9pPr>
     </p:bodyStyle>
@@ -2377,6 +2426,7 @@
             <a:srgbClr val="111111"/>
           </a:solidFill>
           <a:latin typeface="+mn-lt"/>
+          <a:cs typeface="+mn-cs"/>
         </a:defRPr>
       </a:lvl1pPr>
       <a:lvl2pPr marL="0" indent="0" algn="l">
@@ -2395,6 +2445,7 @@
             <a:srgbClr val="111111"/>
           </a:solidFill>
           <a:latin typeface="+mn-lt"/>
+          <a:cs typeface="+mn-cs"/>
         </a:defRPr>
       </a:lvl2pPr>
       <a:lvl3pPr marL="0" indent="0" algn="l">
@@ -2413,6 +2464,7 @@
             <a:srgbClr val="111111"/>
           </a:solidFill>
           <a:latin typeface="+mn-lt"/>
+          <a:cs typeface="+mn-cs"/>
         </a:defRPr>
       </a:lvl3pPr>
       <a:lvl4pPr marL="0" indent="0" algn="l">
@@ -2431,6 +2483,7 @@
             <a:srgbClr val="111111"/>
           </a:solidFill>
           <a:latin typeface="+mn-lt"/>
+          <a:cs typeface="+mn-cs"/>
         </a:defRPr>
       </a:lvl4pPr>
       <a:lvl5pPr marL="0" indent="0" algn="l">
@@ -2449,6 +2502,7 @@
             <a:srgbClr val="111111"/>
           </a:solidFill>
           <a:latin typeface="+mn-lt"/>
+          <a:cs typeface="+mn-cs"/>
         </a:defRPr>
       </a:lvl5pPr>
       <a:lvl6pPr marL="0" indent="0" algn="l">
@@ -2467,6 +2521,7 @@
             <a:srgbClr val="111111"/>
           </a:solidFill>
           <a:latin typeface="+mn-lt"/>
+          <a:cs typeface="+mn-cs"/>
         </a:defRPr>
       </a:lvl6pPr>
       <a:lvl7pPr marL="0" indent="0" algn="l">
@@ -2485,6 +2540,7 @@
             <a:srgbClr val="111111"/>
           </a:solidFill>
           <a:latin typeface="+mn-lt"/>
+          <a:cs typeface="+mn-cs"/>
         </a:defRPr>
       </a:lvl7pPr>
       <a:lvl8pPr marL="0" indent="0" algn="l">
@@ -2503,6 +2559,7 @@
             <a:srgbClr val="111111"/>
           </a:solidFill>
           <a:latin typeface="+mn-lt"/>
+          <a:cs typeface="+mn-cs"/>
         </a:defRPr>
       </a:lvl8pPr>
       <a:lvl9pPr marL="0" indent="0" algn="l">
@@ -2521,6 +2578,7 @@
             <a:srgbClr val="111111"/>
           </a:solidFill>
           <a:latin typeface="+mn-lt"/>
+          <a:cs typeface="+mn-cs"/>
         </a:defRPr>
       </a:lvl9pPr>
     </p:otherStyle>
@@ -2757,12 +2815,12 @@
       <a:majorFont>
         <a:latin typeface="Arial"/>
         <a:ea typeface=""/>
-        <a:cs typeface=""/>
+        <a:cs typeface="Arial"/>
       </a:majorFont>
       <a:minorFont>
         <a:latin typeface="Arial"/>
         <a:ea typeface=""/>
-        <a:cs typeface=""/>
+        <a:cs typeface="Arial"/>
       </a:minorFont>
     </a:fontScheme>
     <a:fmtScheme name="swiss">
